--- a/content/kits/ai-1-3/slides-ar.pptx
+++ b/content/kits/ai-1-3/slides-ar.pptx
@@ -1347,7 +1347,7 @@
       </p:sp>
       <p:pic>
         <p:nvPicPr>
-          <p:cNvPr id="3" name="Image 0" descr="/home/claude/darsi/apps/web/public/app-icons/app-icon-192.png">    </p:cNvPr>
+          <p:cNvPr id="3" name="Image 0" descr="H:\htdocs\darsi\apps\web\public\app-icons\app-icon-192.png">    </p:cNvPr>
           <p:cNvPicPr>
             <a:picLocks noChangeAspect="1"/>
           </p:cNvPicPr>
@@ -1402,7 +1402,7 @@
                 <a:ea typeface="Arial" pitchFamily="34" charset="-122"/>
                 <a:cs typeface="Arial" pitchFamily="34" charset="-120"/>
               </a:rPr>
-              <a:t>درسي — يُسمح بنسخها لمدرستك مجانًا  ·  تحقّق قبل أن تثق  ·  ١</a:t>
+              <a:t>درسي — يُسمح بنسخها لمدرستك مجانًا، تحقّق قبل أن تثق، ١</a:t>
             </a:r>
             <a:endParaRPr lang="ar-SA" sz="1100" dirty="0"/>
           </a:p>
@@ -1437,7 +1437,7 @@
       </p:sp>
       <p:pic>
         <p:nvPicPr>
-          <p:cNvPr id="6" name="Image 1" descr="/home/claude/darsi/apps/web/public/app-icons/app-icon-192.png">    </p:cNvPr>
+          <p:cNvPr id="6" name="Image 1" descr="H:\htdocs\darsi\apps\web\public\app-icons\app-icon-192.png">    </p:cNvPr>
           <p:cNvPicPr>
             <a:picLocks noChangeAspect="1"/>
           </p:cNvPicPr>
@@ -1596,7 +1596,7 @@
       </p:sp>
       <p:pic>
         <p:nvPicPr>
-          <p:cNvPr id="3" name="Image 0" descr="/home/claude/darsi/apps/web/public/app-icons/app-icon-192.png">    </p:cNvPr>
+          <p:cNvPr id="3" name="Image 0" descr="H:\htdocs\darsi\apps\web\public\app-icons\app-icon-192.png">    </p:cNvPr>
           <p:cNvPicPr>
             <a:picLocks noChangeAspect="1"/>
           </p:cNvPicPr>
@@ -1651,7 +1651,7 @@
                 <a:ea typeface="Arial" pitchFamily="34" charset="-122"/>
                 <a:cs typeface="Arial" pitchFamily="34" charset="-120"/>
               </a:rPr>
-              <a:t>درسي — يُسمح بنسخها لمدرستك مجانًا  ·  تحقّق قبل أن تثق  ·  ٢</a:t>
+              <a:t>درسي — يُسمح بنسخها لمدرستك مجانًا، تحقّق قبل أن تثق، ٢</a:t>
             </a:r>
             <a:endParaRPr lang="ar-SA" sz="1100" dirty="0"/>
           </a:p>
@@ -1719,7 +1719,7 @@
           <a:p>
             <a:pPr rtl="1" algn="r" marL="342900" indent="-342900">
               <a:spcAft>
-                <a:spcPts val="1400"/>
+                <a:spcPts val="1300"/>
               </a:spcAft>
               <a:buSzPct val="100000"/>
               <a:buChar char="●"/>
@@ -1740,7 +1740,7 @@
           <a:p>
             <a:pPr rtl="1" algn="r" marL="342900" indent="-342900">
               <a:spcAft>
-                <a:spcPts val="1400"/>
+                <a:spcPts val="1300"/>
               </a:spcAft>
               <a:buSzPct val="100000"/>
               <a:buChar char="●"/>
@@ -1761,7 +1761,7 @@
           <a:p>
             <a:pPr rtl="1" algn="r" marL="342900" indent="-342900">
               <a:spcAft>
-                <a:spcPts val="1400"/>
+                <a:spcPts val="1300"/>
               </a:spcAft>
               <a:buSzPct val="100000"/>
               <a:buChar char="●"/>
@@ -1840,7 +1840,7 @@
       </p:sp>
       <p:pic>
         <p:nvPicPr>
-          <p:cNvPr id="3" name="Image 0" descr="/home/claude/darsi/apps/web/public/app-icons/app-icon-192.png">    </p:cNvPr>
+          <p:cNvPr id="3" name="Image 0" descr="H:\htdocs\darsi\apps\web\public\app-icons\app-icon-192.png">    </p:cNvPr>
           <p:cNvPicPr>
             <a:picLocks noChangeAspect="1"/>
           </p:cNvPicPr>
@@ -1895,7 +1895,7 @@
                 <a:ea typeface="Arial" pitchFamily="34" charset="-122"/>
                 <a:cs typeface="Arial" pitchFamily="34" charset="-120"/>
               </a:rPr>
-              <a:t>درسي — يُسمح بنسخها لمدرستك مجانًا  ·  تحقّق قبل أن تثق  ·  ٣</a:t>
+              <a:t>درسي — يُسمح بنسخها لمدرستك مجانًا، تحقّق قبل أن تثق، ٣</a:t>
             </a:r>
             <a:endParaRPr lang="ar-SA" sz="1100" dirty="0"/>
           </a:p>
@@ -1963,7 +1963,7 @@
           <a:p>
             <a:pPr rtl="1" algn="r" marL="342900" indent="-342900">
               <a:spcAft>
-                <a:spcPts val="1400"/>
+                <a:spcPts val="1300"/>
               </a:spcAft>
               <a:buSzPct val="100000"/>
               <a:buChar char="●"/>
@@ -1984,7 +1984,7 @@
           <a:p>
             <a:pPr rtl="1" algn="r" marL="342900" indent="-342900">
               <a:spcAft>
-                <a:spcPts val="1400"/>
+                <a:spcPts val="1300"/>
               </a:spcAft>
               <a:buSzPct val="100000"/>
               <a:buChar char="●"/>
@@ -2005,7 +2005,7 @@
           <a:p>
             <a:pPr rtl="1" algn="r" marL="342900" indent="-342900">
               <a:spcAft>
-                <a:spcPts val="1400"/>
+                <a:spcPts val="1300"/>
               </a:spcAft>
               <a:buSzPct val="100000"/>
               <a:buChar char="●"/>
@@ -2084,7 +2084,7 @@
       </p:sp>
       <p:pic>
         <p:nvPicPr>
-          <p:cNvPr id="3" name="Image 0" descr="/home/claude/darsi/apps/web/public/app-icons/app-icon-192.png">    </p:cNvPr>
+          <p:cNvPr id="3" name="Image 0" descr="H:\htdocs\darsi\apps\web\public\app-icons\app-icon-192.png">    </p:cNvPr>
           <p:cNvPicPr>
             <a:picLocks noChangeAspect="1"/>
           </p:cNvPicPr>
@@ -2139,7 +2139,7 @@
                 <a:ea typeface="Arial" pitchFamily="34" charset="-122"/>
                 <a:cs typeface="Arial" pitchFamily="34" charset="-120"/>
               </a:rPr>
-              <a:t>درسي — يُسمح بنسخها لمدرستك مجانًا  ·  تحقّق قبل أن تثق  ·  ٤</a:t>
+              <a:t>درسي — يُسمح بنسخها لمدرستك مجانًا، تحقّق قبل أن تثق، ٤</a:t>
             </a:r>
             <a:endParaRPr lang="ar-SA" sz="1100" dirty="0"/>
           </a:p>
@@ -2207,7 +2207,7 @@
           <a:p>
             <a:pPr rtl="1" algn="r" marL="342900" indent="-342900">
               <a:spcAft>
-                <a:spcPts val="1400"/>
+                <a:spcPts val="1300"/>
               </a:spcAft>
               <a:buSzPct val="100000"/>
               <a:buFont typeface="+mj-lt"/>
@@ -2229,7 +2229,7 @@
           <a:p>
             <a:pPr rtl="1" algn="r" marL="342900" indent="-342900">
               <a:spcAft>
-                <a:spcPts val="1400"/>
+                <a:spcPts val="1300"/>
               </a:spcAft>
               <a:buSzPct val="100000"/>
               <a:buFont typeface="+mj-lt"/>
@@ -2251,7 +2251,7 @@
           <a:p>
             <a:pPr rtl="1" algn="r" marL="342900" indent="-342900">
               <a:spcAft>
-                <a:spcPts val="1400"/>
+                <a:spcPts val="1300"/>
               </a:spcAft>
               <a:buSzPct val="100000"/>
               <a:buFont typeface="+mj-lt"/>
@@ -2397,7 +2397,7 @@
       </p:sp>
       <p:pic>
         <p:nvPicPr>
-          <p:cNvPr id="3" name="Image 0" descr="/home/claude/darsi/apps/web/public/app-icons/app-icon-192.png">    </p:cNvPr>
+          <p:cNvPr id="3" name="Image 0" descr="H:\htdocs\darsi\apps\web\public\app-icons\app-icon-192.png">    </p:cNvPr>
           <p:cNvPicPr>
             <a:picLocks noChangeAspect="1"/>
           </p:cNvPicPr>
@@ -2452,7 +2452,7 @@
                 <a:ea typeface="Arial" pitchFamily="34" charset="-122"/>
                 <a:cs typeface="Arial" pitchFamily="34" charset="-120"/>
               </a:rPr>
-              <a:t>درسي — يُسمح بنسخها لمدرستك مجانًا  ·  تحقّق قبل أن تثق  ·  ٥</a:t>
+              <a:t>درسي — يُسمح بنسخها لمدرستك مجانًا، تحقّق قبل أن تثق، ٥</a:t>
             </a:r>
             <a:endParaRPr lang="ar-SA" sz="1100" dirty="0"/>
           </a:p>
@@ -2520,7 +2520,7 @@
           <a:p>
             <a:pPr rtl="1" algn="r" marL="342900" indent="-342900">
               <a:spcAft>
-                <a:spcPts val="1400"/>
+                <a:spcPts val="1300"/>
               </a:spcAft>
               <a:buSzPct val="100000"/>
               <a:buFont typeface="+mj-lt"/>
@@ -2542,7 +2542,7 @@
           <a:p>
             <a:pPr rtl="1" algn="r" marL="342900" indent="-342900">
               <a:spcAft>
-                <a:spcPts val="1400"/>
+                <a:spcPts val="1300"/>
               </a:spcAft>
               <a:buSzPct val="100000"/>
               <a:buFont typeface="+mj-lt"/>
@@ -2622,7 +2622,7 @@
       </p:sp>
       <p:pic>
         <p:nvPicPr>
-          <p:cNvPr id="3" name="Image 0" descr="/home/claude/darsi/apps/web/public/app-icons/app-icon-192.png">    </p:cNvPr>
+          <p:cNvPr id="3" name="Image 0" descr="H:\htdocs\darsi\apps\web\public\app-icons\app-icon-192.png">    </p:cNvPr>
           <p:cNvPicPr>
             <a:picLocks noChangeAspect="1"/>
           </p:cNvPicPr>
@@ -2677,7 +2677,7 @@
                 <a:ea typeface="Arial" pitchFamily="34" charset="-122"/>
                 <a:cs typeface="Arial" pitchFamily="34" charset="-120"/>
               </a:rPr>
-              <a:t>درسي — يُسمح بنسخها لمدرستك مجانًا  ·  تحقّق قبل أن تثق  ·  ٦</a:t>
+              <a:t>درسي — يُسمح بنسخها لمدرستك مجانًا، تحقّق قبل أن تثق، ٦</a:t>
             </a:r>
             <a:endParaRPr lang="ar-SA" sz="1100" dirty="0"/>
           </a:p>
@@ -2745,7 +2745,7 @@
           <a:p>
             <a:pPr rtl="1" algn="r" marL="342900" indent="-342900">
               <a:spcAft>
-                <a:spcPts val="1400"/>
+                <a:spcPts val="1300"/>
               </a:spcAft>
               <a:buSzPct val="100000"/>
               <a:buChar char="●"/>
@@ -2766,7 +2766,7 @@
           <a:p>
             <a:pPr rtl="1" algn="r" marL="342900" indent="-342900">
               <a:spcAft>
-                <a:spcPts val="1400"/>
+                <a:spcPts val="1300"/>
               </a:spcAft>
               <a:buSzPct val="100000"/>
               <a:buChar char="●"/>
